--- a/D - 智科-考研专区/HDU智科专业考研指引v1.pptx
+++ b/D - 智科-考研专区/HDU智科专业考研指引v1.pptx
@@ -30,51 +30,51 @@
       <p:regular r:id="rId16"/>
     </p:embeddedFont>
     <p:embeddedFont>
-      <p:font typeface="Segoe UI" panose="020B0502040204020203" pitchFamily="34" charset="0"/>
+      <p:font typeface="等线" panose="02010600030101010101" pitchFamily="2" charset="-122"/>
       <p:regular r:id="rId17"/>
       <p:bold r:id="rId18"/>
-      <p:italic r:id="rId19"/>
-      <p:boldItalic r:id="rId20"/>
+    </p:embeddedFont>
+    <p:embeddedFont>
+      <p:font typeface="等线 Light" panose="02010600030101010101" pitchFamily="2" charset="-122"/>
+      <p:regular r:id="rId19"/>
+    </p:embeddedFont>
+    <p:embeddedFont>
+      <p:font typeface="方正大标宋简体" panose="03000509000000000000" pitchFamily="65" charset="-122"/>
+      <p:regular r:id="rId20"/>
+    </p:embeddedFont>
+    <p:embeddedFont>
+      <p:font typeface="仿宋" panose="02010609060101010101" pitchFamily="49" charset="-122"/>
+      <p:regular r:id="rId21"/>
+    </p:embeddedFont>
+    <p:embeddedFont>
+      <p:font typeface="黑体" panose="02010609060101010101" pitchFamily="49" charset="-122"/>
+      <p:regular r:id="rId22"/>
+    </p:embeddedFont>
+    <p:embeddedFont>
+      <p:font typeface="华文中宋" panose="02010600040101010101" pitchFamily="2" charset="-122"/>
+      <p:regular r:id="rId23"/>
+    </p:embeddedFont>
+    <p:embeddedFont>
+      <p:font typeface="Segoe UI" panose="020B0502040204020203" pitchFamily="34" charset="0"/>
+      <p:regular r:id="rId24"/>
+      <p:bold r:id="rId25"/>
+      <p:italic r:id="rId26"/>
+      <p:boldItalic r:id="rId27"/>
     </p:embeddedFont>
     <p:embeddedFont>
       <p:font typeface="Tw Cen MT" panose="020B0602020104020603" pitchFamily="34" charset="0"/>
-      <p:regular r:id="rId21"/>
-      <p:bold r:id="rId22"/>
-      <p:italic r:id="rId23"/>
-      <p:boldItalic r:id="rId24"/>
+      <p:regular r:id="rId28"/>
+      <p:bold r:id="rId29"/>
+      <p:italic r:id="rId30"/>
+      <p:boldItalic r:id="rId31"/>
     </p:embeddedFont>
     <p:embeddedFont>
       <p:font typeface="Tw Cen MT Condensed" panose="020B0606020104020203" pitchFamily="34" charset="0"/>
-      <p:regular r:id="rId25"/>
-      <p:bold r:id="rId26"/>
+      <p:regular r:id="rId32"/>
+      <p:bold r:id="rId33"/>
     </p:embeddedFont>
     <p:embeddedFont>
       <p:font typeface="Wingdings 3" panose="05040102010807070707" pitchFamily="18" charset="2"/>
-      <p:regular r:id="rId27"/>
-    </p:embeddedFont>
-    <p:embeddedFont>
-      <p:font typeface="等线" panose="02010600030101010101" pitchFamily="2" charset="-122"/>
-      <p:regular r:id="rId28"/>
-      <p:bold r:id="rId29"/>
-    </p:embeddedFont>
-    <p:embeddedFont>
-      <p:font typeface="等线 Light" panose="02010600030101010101" pitchFamily="2" charset="-122"/>
-      <p:regular r:id="rId30"/>
-    </p:embeddedFont>
-    <p:embeddedFont>
-      <p:font typeface="方正大标宋简体" panose="03000509000000000000" pitchFamily="65" charset="-122"/>
-      <p:regular r:id="rId31"/>
-    </p:embeddedFont>
-    <p:embeddedFont>
-      <p:font typeface="仿宋" panose="02010609060101010101" pitchFamily="49" charset="-122"/>
-      <p:regular r:id="rId32"/>
-    </p:embeddedFont>
-    <p:embeddedFont>
-      <p:font typeface="黑体" panose="02010609060101010101" pitchFamily="49" charset="-122"/>
-      <p:regular r:id="rId33"/>
-    </p:embeddedFont>
-    <p:embeddedFont>
-      <p:font typeface="华文中宋" panose="02010600040101010101" pitchFamily="2" charset="-122"/>
       <p:regular r:id="rId34"/>
     </p:embeddedFont>
   </p:embeddedFontLst>
@@ -289,7 +289,7 @@
           <a:p>
             <a:fld id="{CBE3D678-91B1-416E-8331-0FE75487AFE9}" type="datetimeFigureOut">
               <a:rPr lang="zh-CN" altLang="en-US" smtClean="0"/>
-              <a:t>2025/03/24</a:t>
+              <a:t>2026/03/20</a:t>
             </a:fld>
             <a:endParaRPr lang="zh-CN" altLang="en-US"/>
           </a:p>
@@ -531,7 +531,7 @@
           <a:p>
             <a:fld id="{BBABE942-315C-48B1-95A3-5402AA0736A7}" type="datetimeFigureOut">
               <a:rPr lang="zh-CN" altLang="en-US" smtClean="0"/>
-              <a:t>2025/03/24</a:t>
+              <a:t>2026/03/20</a:t>
             </a:fld>
             <a:endParaRPr lang="zh-CN" altLang="en-US"/>
           </a:p>
@@ -729,7 +729,7 @@
           <a:p>
             <a:fld id="{BBABE942-315C-48B1-95A3-5402AA0736A7}" type="datetimeFigureOut">
               <a:rPr lang="zh-CN" altLang="en-US" smtClean="0"/>
-              <a:t>2025/03/24</a:t>
+              <a:t>2026/03/20</a:t>
             </a:fld>
             <a:endParaRPr lang="zh-CN" altLang="en-US"/>
           </a:p>
@@ -937,7 +937,7 @@
           <a:p>
             <a:fld id="{BBABE942-315C-48B1-95A3-5402AA0736A7}" type="datetimeFigureOut">
               <a:rPr lang="zh-CN" altLang="en-US" smtClean="0"/>
-              <a:t>2025/03/24</a:t>
+              <a:t>2026/03/20</a:t>
             </a:fld>
             <a:endParaRPr lang="zh-CN" altLang="en-US"/>
           </a:p>
@@ -9803,7 +9803,7 @@
           <a:p>
             <a:fld id="{BBABE942-315C-48B1-95A3-5402AA0736A7}" type="datetimeFigureOut">
               <a:rPr lang="zh-CN" altLang="en-US" smtClean="0"/>
-              <a:t>2025/03/24</a:t>
+              <a:t>2026/03/20</a:t>
             </a:fld>
             <a:endParaRPr lang="zh-CN" altLang="en-US"/>
           </a:p>
@@ -10010,7 +10010,7 @@
           <a:p>
             <a:fld id="{BBABE942-315C-48B1-95A3-5402AA0736A7}" type="datetimeFigureOut">
               <a:rPr lang="zh-CN" altLang="en-US" smtClean="0"/>
-              <a:t>2025/03/24</a:t>
+              <a:t>2026/03/20</a:t>
             </a:fld>
             <a:endParaRPr lang="zh-CN" altLang="en-US"/>
           </a:p>
@@ -18908,7 +18908,7 @@
           <a:p>
             <a:fld id="{BBABE942-315C-48B1-95A3-5402AA0736A7}" type="datetimeFigureOut">
               <a:rPr lang="zh-CN" altLang="en-US" smtClean="0"/>
-              <a:t>2025/03/24</a:t>
+              <a:t>2026/03/20</a:t>
             </a:fld>
             <a:endParaRPr lang="zh-CN" altLang="en-US"/>
           </a:p>
@@ -19182,7 +19182,7 @@
           <a:p>
             <a:fld id="{BBABE942-315C-48B1-95A3-5402AA0736A7}" type="datetimeFigureOut">
               <a:rPr lang="zh-CN" altLang="en-US" smtClean="0"/>
-              <a:t>2025/03/24</a:t>
+              <a:t>2026/03/20</a:t>
             </a:fld>
             <a:endParaRPr lang="zh-CN" altLang="en-US"/>
           </a:p>
@@ -19580,7 +19580,7 @@
           <a:p>
             <a:fld id="{BBABE942-315C-48B1-95A3-5402AA0736A7}" type="datetimeFigureOut">
               <a:rPr lang="zh-CN" altLang="en-US" smtClean="0"/>
-              <a:t>2025/03/24</a:t>
+              <a:t>2026/03/20</a:t>
             </a:fld>
             <a:endParaRPr lang="zh-CN" altLang="en-US"/>
           </a:p>
@@ -19698,7 +19698,7 @@
           <a:p>
             <a:fld id="{BBABE942-315C-48B1-95A3-5402AA0736A7}" type="datetimeFigureOut">
               <a:rPr lang="zh-CN" altLang="en-US" smtClean="0"/>
-              <a:t>2025/03/24</a:t>
+              <a:t>2026/03/20</a:t>
             </a:fld>
             <a:endParaRPr lang="zh-CN" altLang="en-US"/>
           </a:p>
@@ -19793,7 +19793,7 @@
           <a:p>
             <a:fld id="{BBABE942-315C-48B1-95A3-5402AA0736A7}" type="datetimeFigureOut">
               <a:rPr lang="zh-CN" altLang="en-US" smtClean="0"/>
-              <a:t>2025/03/24</a:t>
+              <a:t>2026/03/20</a:t>
             </a:fld>
             <a:endParaRPr lang="zh-CN" altLang="en-US"/>
           </a:p>
@@ -20083,7 +20083,7 @@
           <a:p>
             <a:fld id="{BBABE942-315C-48B1-95A3-5402AA0736A7}" type="datetimeFigureOut">
               <a:rPr lang="zh-CN" altLang="en-US" smtClean="0"/>
-              <a:t>2025/03/24</a:t>
+              <a:t>2026/03/20</a:t>
             </a:fld>
             <a:endParaRPr lang="zh-CN" altLang="en-US"/>
           </a:p>
@@ -20269,7 +20269,7 @@
           <a:p>
             <a:fld id="{BBABE942-315C-48B1-95A3-5402AA0736A7}" type="datetimeFigureOut">
               <a:rPr lang="zh-CN" altLang="en-US" smtClean="0"/>
-              <a:t>2025/03/24</a:t>
+              <a:t>2026/03/20</a:t>
             </a:fld>
             <a:endParaRPr lang="zh-CN" altLang="en-US"/>
           </a:p>
@@ -20561,7 +20561,7 @@
           <a:p>
             <a:fld id="{BBABE942-315C-48B1-95A3-5402AA0736A7}" type="datetimeFigureOut">
               <a:rPr lang="zh-CN" altLang="en-US" smtClean="0"/>
-              <a:t>2025/03/24</a:t>
+              <a:t>2026/03/20</a:t>
             </a:fld>
             <a:endParaRPr lang="zh-CN" altLang="en-US"/>
           </a:p>
@@ -20766,7 +20766,7 @@
           <a:p>
             <a:fld id="{BBABE942-315C-48B1-95A3-5402AA0736A7}" type="datetimeFigureOut">
               <a:rPr lang="zh-CN" altLang="en-US" smtClean="0"/>
-              <a:t>2025/03/24</a:t>
+              <a:t>2026/03/20</a:t>
             </a:fld>
             <a:endParaRPr lang="zh-CN" altLang="en-US"/>
           </a:p>
@@ -20946,7 +20946,7 @@
           <a:p>
             <a:fld id="{BBABE942-315C-48B1-95A3-5402AA0736A7}" type="datetimeFigureOut">
               <a:rPr lang="zh-CN" altLang="en-US" smtClean="0"/>
-              <a:t>2025/03/24</a:t>
+              <a:t>2026/03/20</a:t>
             </a:fld>
             <a:endParaRPr lang="zh-CN" altLang="en-US"/>
           </a:p>
@@ -21244,7 +21244,7 @@
           <a:p>
             <a:fld id="{BBABE942-315C-48B1-95A3-5402AA0736A7}" type="datetimeFigureOut">
               <a:rPr lang="zh-CN" altLang="en-US" smtClean="0"/>
-              <a:t>2025/03/24</a:t>
+              <a:t>2026/03/20</a:t>
             </a:fld>
             <a:endParaRPr lang="zh-CN" altLang="en-US"/>
           </a:p>
@@ -21509,7 +21509,7 @@
           <a:p>
             <a:fld id="{BBABE942-315C-48B1-95A3-5402AA0736A7}" type="datetimeFigureOut">
               <a:rPr lang="zh-CN" altLang="en-US" smtClean="0"/>
-              <a:t>2025/03/24</a:t>
+              <a:t>2026/03/20</a:t>
             </a:fld>
             <a:endParaRPr lang="zh-CN" altLang="en-US"/>
           </a:p>
@@ -21921,7 +21921,7 @@
           <a:p>
             <a:fld id="{BBABE942-315C-48B1-95A3-5402AA0736A7}" type="datetimeFigureOut">
               <a:rPr lang="zh-CN" altLang="en-US" smtClean="0"/>
-              <a:t>2025/03/24</a:t>
+              <a:t>2026/03/20</a:t>
             </a:fld>
             <a:endParaRPr lang="zh-CN" altLang="en-US"/>
           </a:p>
@@ -22062,7 +22062,7 @@
           <a:p>
             <a:fld id="{BBABE942-315C-48B1-95A3-5402AA0736A7}" type="datetimeFigureOut">
               <a:rPr lang="zh-CN" altLang="en-US" smtClean="0"/>
-              <a:t>2025/03/24</a:t>
+              <a:t>2026/03/20</a:t>
             </a:fld>
             <a:endParaRPr lang="zh-CN" altLang="en-US"/>
           </a:p>
@@ -22175,7 +22175,7 @@
           <a:p>
             <a:fld id="{BBABE942-315C-48B1-95A3-5402AA0736A7}" type="datetimeFigureOut">
               <a:rPr lang="zh-CN" altLang="en-US" smtClean="0"/>
-              <a:t>2025/03/24</a:t>
+              <a:t>2026/03/20</a:t>
             </a:fld>
             <a:endParaRPr lang="zh-CN" altLang="en-US"/>
           </a:p>
@@ -22486,7 +22486,7 @@
           <a:p>
             <a:fld id="{BBABE942-315C-48B1-95A3-5402AA0736A7}" type="datetimeFigureOut">
               <a:rPr lang="zh-CN" altLang="en-US" smtClean="0"/>
-              <a:t>2025/03/24</a:t>
+              <a:t>2026/03/20</a:t>
             </a:fld>
             <a:endParaRPr lang="zh-CN" altLang="en-US"/>
           </a:p>
@@ -22774,7 +22774,7 @@
           <a:p>
             <a:fld id="{BBABE942-315C-48B1-95A3-5402AA0736A7}" type="datetimeFigureOut">
               <a:rPr lang="zh-CN" altLang="en-US" smtClean="0"/>
-              <a:t>2025/03/24</a:t>
+              <a:t>2026/03/20</a:t>
             </a:fld>
             <a:endParaRPr lang="zh-CN" altLang="en-US"/>
           </a:p>
@@ -23015,7 +23015,7 @@
           <a:p>
             <a:fld id="{BBABE942-315C-48B1-95A3-5402AA0736A7}" type="datetimeFigureOut">
               <a:rPr lang="zh-CN" altLang="en-US" smtClean="0"/>
-              <a:t>2025/03/24</a:t>
+              <a:t>2026/03/20</a:t>
             </a:fld>
             <a:endParaRPr lang="zh-CN" altLang="en-US"/>
           </a:p>
@@ -23569,7 +23569,7 @@
           <a:p>
             <a:fld id="{BBABE942-315C-48B1-95A3-5402AA0736A7}" type="datetimeFigureOut">
               <a:rPr lang="zh-CN" altLang="en-US" smtClean="0"/>
-              <a:t>2025/03/24</a:t>
+              <a:t>2026/03/20</a:t>
             </a:fld>
             <a:endParaRPr lang="zh-CN" altLang="en-US"/>
           </a:p>
@@ -24089,8 +24089,8 @@
         </p:nvSpPr>
         <p:spPr>
           <a:xfrm>
-            <a:off x="0" y="4828256"/>
-            <a:ext cx="8212016" cy="1463040"/>
+            <a:off x="123093" y="4898595"/>
+            <a:ext cx="11324492" cy="1463040"/>
           </a:xfrm>
         </p:spPr>
         <p:txBody>
@@ -24111,7 +24111,21 @@
                 <a:latin typeface="Aa福禄榜书" panose="00020600040101010101" pitchFamily="18" charset="-122"/>
                 <a:ea typeface="Aa福禄榜书" panose="00020600040101010101" pitchFamily="18" charset="-122"/>
               </a:rPr>
-              <a:t>智科专业考研指引</a:t>
+              <a:t>智科</a:t>
+            </a:r>
+            <a:r>
+              <a:rPr lang="en-US" altLang="zh-CN" sz="5400" dirty="0">
+                <a:latin typeface="Aa福禄榜书" panose="00020600040101010101" pitchFamily="18" charset="-122"/>
+                <a:ea typeface="Aa福禄榜书" panose="00020600040101010101" pitchFamily="18" charset="-122"/>
+              </a:rPr>
+              <a:t>/</a:t>
+            </a:r>
+            <a:r>
+              <a:rPr lang="zh-CN" altLang="en-US" sz="5400" dirty="0">
+                <a:latin typeface="Aa福禄榜书" panose="00020600040101010101" pitchFamily="18" charset="-122"/>
+                <a:ea typeface="Aa福禄榜书" panose="00020600040101010101" pitchFamily="18" charset="-122"/>
+              </a:rPr>
+              <a:t>人工智能  考研指引</a:t>
             </a:r>
           </a:p>
         </p:txBody>
@@ -24191,7 +24205,7 @@
                 <a:ea typeface="等线" panose="02010600030101010101" pitchFamily="2" charset="-122"/>
                 <a:cs typeface="阿里巴巴普惠体 Light" panose="00020600040101010101" pitchFamily="18" charset="-122"/>
               </a:rPr>
-              <a:t>专业适用（</a:t>
+              <a:t>专业适用  </a:t>
             </a:r>
             <a:r>
               <a:rPr lang="en-US" altLang="zh-CN" dirty="0">
@@ -24202,51 +24216,7 @@
                 <a:ea typeface="等线" panose="02010600030101010101" pitchFamily="2" charset="-122"/>
                 <a:cs typeface="阿里巴巴普惠体 Light" panose="00020600040101010101" pitchFamily="18" charset="-122"/>
               </a:rPr>
-              <a:t>2026.12</a:t>
-            </a:r>
-            <a:r>
-              <a:rPr lang="zh-CN" altLang="en-US" dirty="0">
-                <a:solidFill>
-                  <a:srgbClr val="1482AC"/>
-                </a:solidFill>
-                <a:latin typeface="等线" panose="02010600030101010101" pitchFamily="2" charset="-122"/>
-                <a:ea typeface="等线" panose="02010600030101010101" pitchFamily="2" charset="-122"/>
-                <a:cs typeface="阿里巴巴普惠体 Light" panose="00020600040101010101" pitchFamily="18" charset="-122"/>
-              </a:rPr>
-              <a:t>初试</a:t>
-            </a:r>
-            <a:r>
-              <a:rPr lang="en-US" altLang="zh-CN" dirty="0">
-                <a:solidFill>
-                  <a:srgbClr val="1482AC"/>
-                </a:solidFill>
-                <a:latin typeface="等线" panose="02010600030101010101" pitchFamily="2" charset="-122"/>
-                <a:ea typeface="等线" panose="02010600030101010101" pitchFamily="2" charset="-122"/>
-                <a:cs typeface="阿里巴巴普惠体 Light" panose="00020600040101010101" pitchFamily="18" charset="-122"/>
-              </a:rPr>
-              <a:t>+2027.3</a:t>
-            </a:r>
-            <a:r>
-              <a:rPr lang="zh-CN" altLang="en-US" dirty="0">
-                <a:solidFill>
-                  <a:srgbClr val="1482AC"/>
-                </a:solidFill>
-                <a:latin typeface="等线" panose="02010600030101010101" pitchFamily="2" charset="-122"/>
-                <a:ea typeface="等线" panose="02010600030101010101" pitchFamily="2" charset="-122"/>
-                <a:cs typeface="阿里巴巴普惠体 Light" panose="00020600040101010101" pitchFamily="18" charset="-122"/>
-              </a:rPr>
-              <a:t>复试）  </a:t>
-            </a:r>
-            <a:r>
-              <a:rPr lang="en-US" altLang="zh-CN" dirty="0">
-                <a:solidFill>
-                  <a:srgbClr val="1482AC"/>
-                </a:solidFill>
-                <a:latin typeface="等线" panose="02010600030101010101" pitchFamily="2" charset="-122"/>
-                <a:ea typeface="等线" panose="02010600030101010101" pitchFamily="2" charset="-122"/>
-                <a:cs typeface="阿里巴巴普惠体 Light" panose="00020600040101010101" pitchFamily="18" charset="-122"/>
-              </a:rPr>
-              <a:t>Powered by Arisu Shiro  </a:t>
+              <a:t>Powered by Kureha Shiro  </a:t>
             </a:r>
             <a:r>
               <a:rPr lang="zh-CN" altLang="en-US" dirty="0">
@@ -24948,7 +24918,7 @@
         <p:spPr>
           <a:xfrm>
             <a:off x="1233120" y="2273630"/>
-            <a:ext cx="8170252" cy="923330"/>
+            <a:ext cx="8170252" cy="1015663"/>
           </a:xfrm>
           <a:prstGeom prst="rect">
             <a:avLst/>
@@ -24962,20 +24932,20 @@
           <a:lstStyle/>
           <a:p>
             <a:r>
-              <a:rPr lang="zh-CN" altLang="en-US" dirty="0"/>
+              <a:rPr lang="zh-CN" altLang="en-US" sz="2000" dirty="0"/>
               <a:t>考研要培养的是：有自学能力、热爱科研的人。</a:t>
             </a:r>
-            <a:endParaRPr lang="en-US" altLang="zh-CN" dirty="0"/>
+            <a:endParaRPr lang="en-US" altLang="zh-CN" sz="2000" dirty="0"/>
           </a:p>
           <a:p>
-            <a:endParaRPr lang="en-US" altLang="zh-CN" dirty="0"/>
+            <a:endParaRPr lang="en-US" altLang="zh-CN" sz="2000" dirty="0"/>
           </a:p>
           <a:p>
             <a:r>
-              <a:rPr lang="zh-CN" altLang="en-US" dirty="0"/>
+              <a:rPr lang="zh-CN" altLang="en-US" sz="2000" dirty="0"/>
               <a:t>不喜欢科研、不会自学，就没必要考研，考进了也是坐牢三年。</a:t>
             </a:r>
-            <a:endParaRPr lang="en-US" altLang="zh-CN" dirty="0"/>
+            <a:endParaRPr lang="en-US" altLang="zh-CN" sz="2000" dirty="0"/>
           </a:p>
         </p:txBody>
       </p:sp>
@@ -37158,8 +37128,8 @@
         </p:nvSpPr>
         <p:spPr>
           <a:xfrm>
-            <a:off x="311520" y="1425632"/>
-            <a:ext cx="6912951" cy="1153457"/>
+            <a:off x="311521" y="1425632"/>
+            <a:ext cx="5572974" cy="1615122"/>
           </a:xfrm>
           <a:prstGeom prst="rect">
             <a:avLst/>
@@ -37214,252 +37184,20 @@
             </a:pPr>
             <a:r>
               <a:rPr lang="zh-CN" altLang="en-US" sz="2000" dirty="0"/>
-              <a:t>注意：研考参考书目和本科教材不是同一本！</a:t>
+              <a:t>注意：本校研考参考书目从</a:t>
+            </a:r>
+            <a:r>
+              <a:rPr lang="en-US" altLang="zh-CN" sz="2000" dirty="0"/>
+              <a:t>2026</a:t>
+            </a:r>
+            <a:r>
+              <a:rPr lang="zh-CN" altLang="en-US" sz="2000" dirty="0"/>
+              <a:t>年开始，用的是和本科教材同一本（薛安克 主编）！</a:t>
             </a:r>
             <a:endParaRPr lang="en-US" altLang="zh-CN" sz="2000" dirty="0"/>
           </a:p>
         </p:txBody>
       </p:sp>
-      <p:sp>
-        <p:nvSpPr>
-          <p:cNvPr id="9" name="文本框 8">
-            <a:extLst>
-              <a:ext uri="{FF2B5EF4-FFF2-40B4-BE49-F238E27FC236}">
-                <a16:creationId xmlns:a16="http://schemas.microsoft.com/office/drawing/2014/main" id="{BFD8588A-77F1-42D8-B4A4-1A8C8C8C1277}"/>
-              </a:ext>
-            </a:extLst>
-          </p:cNvPr>
-          <p:cNvSpPr txBox="1"/>
-          <p:nvPr/>
-        </p:nvSpPr>
-        <p:spPr>
-          <a:xfrm>
-            <a:off x="287417" y="5080800"/>
-            <a:ext cx="2968858" cy="830997"/>
-          </a:xfrm>
-          <a:prstGeom prst="rect">
-            <a:avLst/>
-          </a:prstGeom>
-          <a:noFill/>
-        </p:spPr>
-        <p:txBody>
-          <a:bodyPr wrap="square">
-            <a:spAutoFit/>
-          </a:bodyPr>
-          <a:lstStyle/>
-          <a:p>
-            <a:r>
-              <a:rPr lang="en-US" altLang="zh-CN" sz="1600" b="0" dirty="0">
-                <a:effectLst/>
-                <a:latin typeface="+mn-ea"/>
-              </a:rPr>
-              <a:t>2025</a:t>
-            </a:r>
-            <a:r>
-              <a:rPr lang="zh-CN" altLang="en-US" sz="1600" b="0" dirty="0">
-                <a:effectLst/>
-                <a:latin typeface="+mn-ea"/>
-              </a:rPr>
-              <a:t>年杭电</a:t>
-            </a:r>
-            <a:r>
-              <a:rPr lang="en-US" altLang="zh-CN" sz="1600" b="0" dirty="0">
-                <a:effectLst/>
-                <a:latin typeface="+mn-ea"/>
-              </a:rPr>
-              <a:t>861</a:t>
-            </a:r>
-            <a:r>
-              <a:rPr lang="zh-CN" altLang="en-US" sz="1600" b="0" dirty="0">
-                <a:effectLst/>
-                <a:latin typeface="+mn-ea"/>
-              </a:rPr>
-              <a:t>大纲分析讲座</a:t>
-            </a:r>
-            <a:endParaRPr lang="en-US" altLang="zh-CN" sz="1600" b="0" dirty="0">
-              <a:effectLst/>
-              <a:latin typeface="+mn-ea"/>
-            </a:endParaRPr>
-          </a:p>
-          <a:p>
-            <a:r>
-              <a:rPr lang="en-US" altLang="zh-CN" sz="1600" dirty="0">
-                <a:latin typeface="+mn-ea"/>
-                <a:hlinkClick r:id="rId2"/>
-              </a:rPr>
-              <a:t>https://www.bilibili.com/video/BV1MEpZe4ENF/</a:t>
-            </a:r>
-            <a:endParaRPr lang="en-US" altLang="zh-CN" sz="1600" dirty="0">
-              <a:latin typeface="+mn-ea"/>
-            </a:endParaRPr>
-          </a:p>
-        </p:txBody>
-      </p:sp>
-      <p:sp>
-        <p:nvSpPr>
-          <p:cNvPr id="10" name="文本框 9">
-            <a:extLst>
-              <a:ext uri="{FF2B5EF4-FFF2-40B4-BE49-F238E27FC236}">
-                <a16:creationId xmlns:a16="http://schemas.microsoft.com/office/drawing/2014/main" id="{72179976-CFF1-4837-8CAE-B43CEBDF64A0}"/>
-              </a:ext>
-            </a:extLst>
-          </p:cNvPr>
-          <p:cNvSpPr txBox="1"/>
-          <p:nvPr/>
-        </p:nvSpPr>
-        <p:spPr>
-          <a:xfrm>
-            <a:off x="311520" y="2906491"/>
-            <a:ext cx="6435970" cy="923330"/>
-          </a:xfrm>
-          <a:prstGeom prst="rect">
-            <a:avLst/>
-          </a:prstGeom>
-          <a:noFill/>
-        </p:spPr>
-        <p:txBody>
-          <a:bodyPr wrap="square">
-            <a:spAutoFit/>
-          </a:bodyPr>
-          <a:lstStyle/>
-          <a:p>
-            <a:r>
-              <a:rPr lang="en-US" altLang="zh-CN" b="1" i="0" dirty="0">
-                <a:solidFill>
-                  <a:srgbClr val="FF0000"/>
-                </a:solidFill>
-                <a:effectLst/>
-                <a:latin typeface="+mn-ea"/>
-              </a:rPr>
-              <a:t>《</a:t>
-            </a:r>
-            <a:r>
-              <a:rPr lang="zh-CN" altLang="en-US" b="1" i="0" dirty="0">
-                <a:solidFill>
-                  <a:srgbClr val="FF0000"/>
-                </a:solidFill>
-                <a:effectLst/>
-                <a:latin typeface="+mn-ea"/>
-              </a:rPr>
-              <a:t>自动控制原理</a:t>
-            </a:r>
-            <a:r>
-              <a:rPr lang="en-US" altLang="zh-CN" b="1" i="0" dirty="0">
-                <a:solidFill>
-                  <a:srgbClr val="FF0000"/>
-                </a:solidFill>
-                <a:effectLst/>
-                <a:latin typeface="+mn-ea"/>
-              </a:rPr>
-              <a:t>》(</a:t>
-            </a:r>
-            <a:r>
-              <a:rPr lang="zh-CN" altLang="en-US" b="1" i="0" dirty="0">
-                <a:solidFill>
-                  <a:srgbClr val="FF0000"/>
-                </a:solidFill>
-                <a:effectLst/>
-                <a:latin typeface="+mn-ea"/>
-              </a:rPr>
-              <a:t>第五版</a:t>
-            </a:r>
-            <a:r>
-              <a:rPr lang="en-US" altLang="zh-CN" b="1" i="0" dirty="0">
-                <a:solidFill>
-                  <a:srgbClr val="FF0000"/>
-                </a:solidFill>
-                <a:effectLst/>
-                <a:latin typeface="+mn-ea"/>
-              </a:rPr>
-              <a:t>)</a:t>
-            </a:r>
-            <a:r>
-              <a:rPr lang="zh-CN" altLang="en-US" b="1" i="0" dirty="0">
-                <a:solidFill>
-                  <a:srgbClr val="FF0000"/>
-                </a:solidFill>
-                <a:effectLst/>
-                <a:latin typeface="+mn-ea"/>
-              </a:rPr>
-              <a:t>，</a:t>
-            </a:r>
-            <a:endParaRPr lang="en-US" altLang="zh-CN" b="1" i="0" dirty="0">
-              <a:solidFill>
-                <a:srgbClr val="FF0000"/>
-              </a:solidFill>
-              <a:effectLst/>
-              <a:latin typeface="+mn-ea"/>
-            </a:endParaRPr>
-          </a:p>
-          <a:p>
-            <a:r>
-              <a:rPr lang="zh-CN" altLang="en-US" b="1" i="0" dirty="0">
-                <a:solidFill>
-                  <a:srgbClr val="FF0000"/>
-                </a:solidFill>
-                <a:effectLst/>
-                <a:latin typeface="+mn-ea"/>
-              </a:rPr>
-              <a:t>胡寿松编，科学出版社，</a:t>
-            </a:r>
-            <a:endParaRPr lang="en-US" altLang="zh-CN" b="1" i="0" dirty="0">
-              <a:solidFill>
-                <a:srgbClr val="FF0000"/>
-              </a:solidFill>
-              <a:effectLst/>
-              <a:latin typeface="+mn-ea"/>
-            </a:endParaRPr>
-          </a:p>
-          <a:p>
-            <a:r>
-              <a:rPr lang="en-US" altLang="zh-CN" b="1" i="0" dirty="0">
-                <a:solidFill>
-                  <a:srgbClr val="FF0000"/>
-                </a:solidFill>
-                <a:effectLst/>
-                <a:latin typeface="+mn-ea"/>
-              </a:rPr>
-              <a:t>2007</a:t>
-            </a:r>
-            <a:endParaRPr lang="zh-CN" altLang="en-US" b="1" dirty="0">
-              <a:solidFill>
-                <a:srgbClr val="FF0000"/>
-              </a:solidFill>
-              <a:latin typeface="+mn-ea"/>
-            </a:endParaRPr>
-          </a:p>
-        </p:txBody>
-      </p:sp>
-      <p:pic>
-        <p:nvPicPr>
-          <p:cNvPr id="11" name="图片 10">
-            <a:extLst>
-              <a:ext uri="{FF2B5EF4-FFF2-40B4-BE49-F238E27FC236}">
-                <a16:creationId xmlns:a16="http://schemas.microsoft.com/office/drawing/2014/main" id="{35B42569-464D-4BB9-85BA-3388B8477AB1}"/>
-              </a:ext>
-            </a:extLst>
-          </p:cNvPr>
-          <p:cNvPicPr>
-            <a:picLocks noChangeAspect="1"/>
-          </p:cNvPicPr>
-          <p:nvPr/>
-        </p:nvPicPr>
-        <p:blipFill>
-          <a:blip r:embed="rId3"/>
-          <a:stretch>
-            <a:fillRect/>
-          </a:stretch>
-        </p:blipFill>
-        <p:spPr>
-          <a:xfrm>
-            <a:off x="3345743" y="2816843"/>
-            <a:ext cx="2471049" cy="3584848"/>
-          </a:xfrm>
-          <a:prstGeom prst="rect">
-            <a:avLst/>
-          </a:prstGeom>
-        </p:spPr>
-      </p:pic>
       <p:sp>
         <p:nvSpPr>
           <p:cNvPr id="8" name="文本框 7">
@@ -38092,6 +37830,55 @@
           </a:p>
         </p:txBody>
       </p:sp>
+      <p:sp>
+        <p:nvSpPr>
+          <p:cNvPr id="13" name="文本框 12">
+            <a:extLst>
+              <a:ext uri="{FF2B5EF4-FFF2-40B4-BE49-F238E27FC236}">
+                <a16:creationId xmlns:a16="http://schemas.microsoft.com/office/drawing/2014/main" id="{0A8CA1C2-414F-43EF-9294-75A103BE2028}"/>
+              </a:ext>
+            </a:extLst>
+          </p:cNvPr>
+          <p:cNvSpPr txBox="1"/>
+          <p:nvPr/>
+        </p:nvSpPr>
+        <p:spPr>
+          <a:xfrm>
+            <a:off x="719649" y="4995977"/>
+            <a:ext cx="4960182" cy="673005"/>
+          </a:xfrm>
+          <a:prstGeom prst="rect">
+            <a:avLst/>
+          </a:prstGeom>
+          <a:noFill/>
+        </p:spPr>
+        <p:txBody>
+          <a:bodyPr wrap="square">
+            <a:spAutoFit/>
+          </a:bodyPr>
+          <a:lstStyle/>
+          <a:p>
+            <a:pPr>
+              <a:lnSpc>
+                <a:spcPct val="150000"/>
+              </a:lnSpc>
+            </a:pPr>
+            <a:r>
+              <a:rPr lang="zh-CN" altLang="en-US" sz="2800" b="1" dirty="0">
+                <a:solidFill>
+                  <a:srgbClr val="FF0000"/>
+                </a:solidFill>
+              </a:rPr>
+              <a:t>每个学校不一样，自己去搜！</a:t>
+            </a:r>
+            <a:endParaRPr lang="en-US" altLang="zh-CN" sz="2800" dirty="0">
+              <a:solidFill>
+                <a:srgbClr val="FF0000"/>
+              </a:solidFill>
+            </a:endParaRPr>
+          </a:p>
+        </p:txBody>
+      </p:sp>
     </p:spTree>
     <p:extLst>
       <p:ext uri="{BB962C8B-B14F-4D97-AF65-F5344CB8AC3E}">
@@ -38203,7 +37990,7 @@
                   <a:srgbClr val="FF0000"/>
                 </a:solidFill>
               </a:rPr>
-              <a:t>华中科技大学 业务课二：</a:t>
+              <a:t>某科技大学 业务课二：</a:t>
             </a:r>
             <a:r>
               <a:rPr lang="zh-CN" altLang="en-US" sz="2800" dirty="0">
@@ -38699,6 +38486,55 @@
           </a:prstGeom>
         </p:spPr>
       </p:pic>
+      <p:sp>
+        <p:nvSpPr>
+          <p:cNvPr id="11" name="文本框 10">
+            <a:extLst>
+              <a:ext uri="{FF2B5EF4-FFF2-40B4-BE49-F238E27FC236}">
+                <a16:creationId xmlns:a16="http://schemas.microsoft.com/office/drawing/2014/main" id="{EC7A0769-E0EB-4F5C-86CE-2704A518336B}"/>
+              </a:ext>
+            </a:extLst>
+          </p:cNvPr>
+          <p:cNvSpPr txBox="1"/>
+          <p:nvPr/>
+        </p:nvSpPr>
+        <p:spPr>
+          <a:xfrm>
+            <a:off x="886703" y="5347670"/>
+            <a:ext cx="4960182" cy="673005"/>
+          </a:xfrm>
+          <a:prstGeom prst="rect">
+            <a:avLst/>
+          </a:prstGeom>
+          <a:noFill/>
+        </p:spPr>
+        <p:txBody>
+          <a:bodyPr wrap="square">
+            <a:spAutoFit/>
+          </a:bodyPr>
+          <a:lstStyle/>
+          <a:p>
+            <a:pPr>
+              <a:lnSpc>
+                <a:spcPct val="150000"/>
+              </a:lnSpc>
+            </a:pPr>
+            <a:r>
+              <a:rPr lang="zh-CN" altLang="en-US" sz="2800" b="1" dirty="0">
+                <a:solidFill>
+                  <a:srgbClr val="FF0000"/>
+                </a:solidFill>
+              </a:rPr>
+              <a:t>每个学校不一样，自己去搜！</a:t>
+            </a:r>
+            <a:endParaRPr lang="en-US" altLang="zh-CN" sz="2800" dirty="0">
+              <a:solidFill>
+                <a:srgbClr val="FF0000"/>
+              </a:solidFill>
+            </a:endParaRPr>
+          </a:p>
+        </p:txBody>
+      </p:sp>
     </p:spTree>
     <p:extLst>
       <p:ext uri="{BB962C8B-B14F-4D97-AF65-F5344CB8AC3E}">
